--- a/SupaDev AI IDE Pitch Deck.pptx
+++ b/SupaDev AI IDE Pitch Deck.pptx
@@ -22,38 +22,37 @@
     <p:sldId id="267" r:id="rId18"/>
     <p:sldId id="268" r:id="rId19"/>
     <p:sldId id="269" r:id="rId20"/>
-    <p:sldId id="270" r:id="rId21"/>
   </p:sldIdLst>
   <p:sldSz cy="6858000" cx="12192000"/>
   <p:notesSz cx="6858000" cy="9144000"/>
   <p:embeddedFontLst>
     <p:embeddedFont>
       <p:font typeface="Inter SemiBold"/>
-      <p:regular r:id="rId22"/>
-      <p:bold r:id="rId23"/>
-      <p:italic r:id="rId24"/>
-      <p:boldItalic r:id="rId25"/>
+      <p:regular r:id="rId21"/>
+      <p:bold r:id="rId22"/>
+      <p:italic r:id="rId23"/>
+      <p:boldItalic r:id="rId24"/>
     </p:embeddedFont>
     <p:embeddedFont>
       <p:font typeface="Inter"/>
-      <p:regular r:id="rId26"/>
-      <p:bold r:id="rId27"/>
-      <p:italic r:id="rId28"/>
-      <p:boldItalic r:id="rId29"/>
+      <p:regular r:id="rId25"/>
+      <p:bold r:id="rId26"/>
+      <p:italic r:id="rId27"/>
+      <p:boldItalic r:id="rId28"/>
     </p:embeddedFont>
     <p:embeddedFont>
       <p:font typeface="Inter Medium"/>
-      <p:regular r:id="rId30"/>
-      <p:bold r:id="rId31"/>
-      <p:italic r:id="rId32"/>
-      <p:boldItalic r:id="rId33"/>
+      <p:regular r:id="rId29"/>
+      <p:bold r:id="rId30"/>
+      <p:italic r:id="rId31"/>
+      <p:boldItalic r:id="rId32"/>
     </p:embeddedFont>
     <p:embeddedFont>
       <p:font typeface="JetBrains Mono"/>
-      <p:regular r:id="rId34"/>
-      <p:bold r:id="rId35"/>
-      <p:italic r:id="rId36"/>
-      <p:boldItalic r:id="rId37"/>
+      <p:regular r:id="rId33"/>
+      <p:bold r:id="rId34"/>
+      <p:italic r:id="rId35"/>
+      <p:boldItalic r:id="rId36"/>
     </p:embeddedFont>
   </p:embeddedFontLst>
   <p:defaultTextStyle>
@@ -1284,105 +1283,6 @@
       <p:sp>
         <p:nvSpPr>
           <p:cNvPr id="361" name="Google Shape;361;p14:notes"/>
-          <p:cNvSpPr/>
-          <p:nvPr>
-            <p:ph idx="2" type="sldImg"/>
-          </p:nvPr>
-        </p:nvSpPr>
-        <p:spPr>
-          <a:xfrm>
-            <a:off x="1143225" y="685800"/>
-            <a:ext cx="4572225" cy="3429000"/>
-          </a:xfrm>
-          <a:custGeom>
-            <a:rect b="b" l="l" r="r" t="t"/>
-            <a:pathLst>
-              <a:path extrusionOk="0" h="120000" w="120000">
-                <a:moveTo>
-                  <a:pt x="0" y="0"/>
-                </a:moveTo>
-                <a:lnTo>
-                  <a:pt x="120000" y="0"/>
-                </a:lnTo>
-                <a:lnTo>
-                  <a:pt x="120000" y="120000"/>
-                </a:lnTo>
-                <a:lnTo>
-                  <a:pt x="0" y="120000"/>
-                </a:lnTo>
-                <a:close/>
-              </a:path>
-            </a:pathLst>
-          </a:custGeom>
-        </p:spPr>
-      </p:sp>
-    </p:spTree>
-  </p:cSld>
-  <p:clrMapOvr>
-    <a:masterClrMapping/>
-  </p:clrMapOvr>
-</p:notes>
-</file>
-
-<file path=ppt/notesSlides/notesSlide15.xml><?xml version="1.0" encoding="utf-8"?>
-<p:notes xmlns:a="http://schemas.openxmlformats.org/drawingml/2006/main" xmlns:r="http://schemas.openxmlformats.org/officeDocument/2006/relationships" xmlns:mc="http://schemas.openxmlformats.org/markup-compatibility/2006" xmlns:mv="urn:schemas-microsoft-com:mac:vml" xmlns:p="http://schemas.openxmlformats.org/presentationml/2006/main" xmlns:c="http://schemas.openxmlformats.org/drawingml/2006/chart" xmlns:dgm="http://schemas.openxmlformats.org/drawingml/2006/diagram" xmlns:o="urn:schemas-microsoft-com:office:office" xmlns:v="urn:schemas-microsoft-com:vml" xmlns:pvml="urn:schemas-microsoft-com:office:powerpoint" xmlns:com="http://schemas.openxmlformats.org/drawingml/2006/compatibility" xmlns:p14="http://schemas.microsoft.com/office/powerpoint/2010/main" xmlns:p15="http://schemas.microsoft.com/office/powerpoint/2012/main" xmlns:ahyp="http://schemas.microsoft.com/office/drawing/2018/hyperlinkcolor" showMasterPhAnim="0" showMasterSp="0">
-  <p:cSld>
-    <p:spTree>
-      <p:nvGrpSpPr>
-        <p:cNvPr id="366" name="Shape 366"/>
-        <p:cNvGrpSpPr/>
-        <p:nvPr/>
-      </p:nvGrpSpPr>
-      <p:grpSpPr>
-        <a:xfrm>
-          <a:off x="0" y="0"/>
-          <a:ext cx="0" cy="0"/>
-          <a:chOff x="0" y="0"/>
-          <a:chExt cx="0" cy="0"/>
-        </a:xfrm>
-      </p:grpSpPr>
-      <p:sp>
-        <p:nvSpPr>
-          <p:cNvPr id="367" name="Google Shape;367;p15:notes"/>
-          <p:cNvSpPr txBox="1"/>
-          <p:nvPr>
-            <p:ph idx="1" type="body"/>
-          </p:nvPr>
-        </p:nvSpPr>
-        <p:spPr>
-          <a:xfrm>
-            <a:off x="685800" y="4343400"/>
-            <a:ext cx="5486400" cy="4114800"/>
-          </a:xfrm>
-          <a:prstGeom prst="rect">
-            <a:avLst/>
-          </a:prstGeom>
-        </p:spPr>
-        <p:txBody>
-          <a:bodyPr anchorCtr="0" anchor="t" bIns="91425" lIns="91425" spcFirstLastPara="1" rIns="91425" wrap="square" tIns="91425">
-            <a:noAutofit/>
-          </a:bodyPr>
-          <a:lstStyle/>
-          <a:p>
-            <a:pPr indent="0" lvl="0" marL="0" rtl="0" algn="l">
-              <a:spcBef>
-                <a:spcPts val="0"/>
-              </a:spcBef>
-              <a:spcAft>
-                <a:spcPts val="0"/>
-              </a:spcAft>
-              <a:buNone/>
-            </a:pPr>
-            <a:r>
-              <a:t/>
-            </a:r>
-            <a:endParaRPr/>
-          </a:p>
-        </p:txBody>
-      </p:sp>
-      <p:sp>
-        <p:nvSpPr>
-          <p:cNvPr id="368" name="Google Shape;368;p15:notes"/>
           <p:cNvSpPr/>
           <p:nvPr>
             <p:ph idx="2" type="sldImg"/>
@@ -12836,7 +12736,7 @@
             <a:tbl>
               <a:tblPr bandRow="1" firstRow="1">
                 <a:noFill/>
-                <a:tableStyleId>{A885F783-D38C-49BA-A554-677BA61341A3}</a:tableStyleId>
+                <a:tableStyleId>{BE37DE3C-FE46-4FFD-BE4B-1389065FC417}</a:tableStyleId>
               </a:tblPr>
               <a:tblGrid>
                 <a:gridCol w="1707350"/>
@@ -16318,1202 +16218,6 @@
 </p:sld>
 </file>
 
-<file path=ppt/slides/slide15.xml><?xml version="1.0" encoding="utf-8"?>
-<p:sld xmlns:a="http://schemas.openxmlformats.org/drawingml/2006/main" xmlns:r="http://schemas.openxmlformats.org/officeDocument/2006/relationships" xmlns:mc="http://schemas.openxmlformats.org/markup-compatibility/2006" xmlns:mv="urn:schemas-microsoft-com:mac:vml" xmlns:p="http://schemas.openxmlformats.org/presentationml/2006/main" xmlns:c="http://schemas.openxmlformats.org/drawingml/2006/chart" xmlns:dgm="http://schemas.openxmlformats.org/drawingml/2006/diagram" xmlns:o="urn:schemas-microsoft-com:office:office" xmlns:v="urn:schemas-microsoft-com:vml" xmlns:pvml="urn:schemas-microsoft-com:office:powerpoint" xmlns:com="http://schemas.openxmlformats.org/drawingml/2006/compatibility" xmlns:p14="http://schemas.microsoft.com/office/powerpoint/2010/main" xmlns:p15="http://schemas.microsoft.com/office/powerpoint/2012/main" xmlns:ahyp="http://schemas.microsoft.com/office/drawing/2018/hyperlinkcolor">
-  <p:cSld>
-    <p:bg>
-      <p:bgPr>
-        <a:solidFill>
-          <a:srgbClr val="1E293B"/>
-        </a:solidFill>
-      </p:bgPr>
-    </p:bg>
-    <p:spTree>
-      <p:nvGrpSpPr>
-        <p:cNvPr id="369" name="Shape 369"/>
-        <p:cNvGrpSpPr/>
-        <p:nvPr/>
-      </p:nvGrpSpPr>
-      <p:grpSpPr>
-        <a:xfrm>
-          <a:off x="0" y="0"/>
-          <a:ext cx="0" cy="0"/>
-          <a:chOff x="0" y="0"/>
-          <a:chExt cx="0" cy="0"/>
-        </a:xfrm>
-      </p:grpSpPr>
-      <p:pic>
-        <p:nvPicPr>
-          <p:cNvPr descr="image.png" id="370" name="Google Shape;370;p27"/>
-          <p:cNvPicPr preferRelativeResize="0"/>
-          <p:nvPr/>
-        </p:nvPicPr>
-        <p:blipFill rotWithShape="1">
-          <a:blip r:embed="rId3">
-            <a:alphaModFix/>
-          </a:blip>
-          <a:srcRect b="0" l="0" r="0" t="0"/>
-          <a:stretch/>
-        </p:blipFill>
-        <p:spPr>
-          <a:xfrm>
-            <a:off x="0" y="0"/>
-            <a:ext cx="12192000" cy="6858000"/>
-          </a:xfrm>
-          <a:prstGeom prst="rect">
-            <a:avLst/>
-          </a:prstGeom>
-          <a:noFill/>
-          <a:ln>
-            <a:noFill/>
-          </a:ln>
-        </p:spPr>
-      </p:pic>
-      <p:sp>
-        <p:nvSpPr>
-          <p:cNvPr id="371" name="Google Shape;371;p27"/>
-          <p:cNvSpPr/>
-          <p:nvPr/>
-        </p:nvSpPr>
-        <p:spPr>
-          <a:xfrm>
-            <a:off x="1023937" y="2329011"/>
-            <a:ext cx="10144125" cy="784770"/>
-          </a:xfrm>
-          <a:prstGeom prst="rect">
-            <a:avLst/>
-          </a:prstGeom>
-          <a:noFill/>
-          <a:ln>
-            <a:noFill/>
-          </a:ln>
-        </p:spPr>
-        <p:txBody>
-          <a:bodyPr anchorCtr="0" anchor="ctr" bIns="45700" lIns="91425" spcFirstLastPara="1" rIns="91425" wrap="square" tIns="45700">
-            <a:noAutofit/>
-          </a:bodyPr>
-          <a:lstStyle/>
-          <a:p>
-            <a:pPr indent="0" lvl="0" marL="0" marR="0" rtl="0" algn="ctr">
-              <a:spcBef>
-                <a:spcPts val="0"/>
-              </a:spcBef>
-              <a:spcAft>
-                <a:spcPts val="0"/>
-              </a:spcAft>
-              <a:buNone/>
-            </a:pPr>
-            <a:r>
-              <a:t/>
-            </a:r>
-            <a:endParaRPr b="0" i="0" sz="1800" u="none" cap="none" strike="noStrike">
-              <a:solidFill>
-                <a:schemeClr val="dk1"/>
-              </a:solidFill>
-              <a:latin typeface="Calibri"/>
-              <a:ea typeface="Calibri"/>
-              <a:cs typeface="Calibri"/>
-              <a:sym typeface="Calibri"/>
-            </a:endParaRPr>
-          </a:p>
-        </p:txBody>
-      </p:sp>
-      <p:sp>
-        <p:nvSpPr>
-          <p:cNvPr id="372" name="Google Shape;372;p27"/>
-          <p:cNvSpPr/>
-          <p:nvPr/>
-        </p:nvSpPr>
-        <p:spPr>
-          <a:xfrm>
-            <a:off x="1023937" y="3113782"/>
-            <a:ext cx="10144125" cy="784770"/>
-          </a:xfrm>
-          <a:prstGeom prst="rect">
-            <a:avLst/>
-          </a:prstGeom>
-          <a:noFill/>
-          <a:ln>
-            <a:noFill/>
-          </a:ln>
-        </p:spPr>
-        <p:txBody>
-          <a:bodyPr anchorCtr="0" anchor="ctr" bIns="45700" lIns="91425" spcFirstLastPara="1" rIns="91425" wrap="square" tIns="45700">
-            <a:noAutofit/>
-          </a:bodyPr>
-          <a:lstStyle/>
-          <a:p>
-            <a:pPr indent="0" lvl="0" marL="0" marR="0" rtl="0" algn="ctr">
-              <a:spcBef>
-                <a:spcPts val="0"/>
-              </a:spcBef>
-              <a:spcAft>
-                <a:spcPts val="0"/>
-              </a:spcAft>
-              <a:buNone/>
-            </a:pPr>
-            <a:r>
-              <a:t/>
-            </a:r>
-            <a:endParaRPr b="0" i="0" sz="1800" u="none" cap="none" strike="noStrike">
-              <a:solidFill>
-                <a:schemeClr val="dk1"/>
-              </a:solidFill>
-              <a:latin typeface="Calibri"/>
-              <a:ea typeface="Calibri"/>
-              <a:cs typeface="Calibri"/>
-              <a:sym typeface="Calibri"/>
-            </a:endParaRPr>
-          </a:p>
-        </p:txBody>
-      </p:sp>
-      <p:sp>
-        <p:nvSpPr>
-          <p:cNvPr id="373" name="Google Shape;373;p27"/>
-          <p:cNvSpPr/>
-          <p:nvPr/>
-        </p:nvSpPr>
-        <p:spPr>
-          <a:xfrm>
-            <a:off x="1023937" y="3898552"/>
-            <a:ext cx="10144125" cy="784770"/>
-          </a:xfrm>
-          <a:prstGeom prst="rect">
-            <a:avLst/>
-          </a:prstGeom>
-          <a:noFill/>
-          <a:ln>
-            <a:noFill/>
-          </a:ln>
-        </p:spPr>
-        <p:txBody>
-          <a:bodyPr anchorCtr="0" anchor="ctr" bIns="45700" lIns="91425" spcFirstLastPara="1" rIns="91425" wrap="square" tIns="45700">
-            <a:noAutofit/>
-          </a:bodyPr>
-          <a:lstStyle/>
-          <a:p>
-            <a:pPr indent="0" lvl="0" marL="0" marR="0" rtl="0" algn="ctr">
-              <a:spcBef>
-                <a:spcPts val="0"/>
-              </a:spcBef>
-              <a:spcAft>
-                <a:spcPts val="0"/>
-              </a:spcAft>
-              <a:buNone/>
-            </a:pPr>
-            <a:r>
-              <a:t/>
-            </a:r>
-            <a:endParaRPr b="0" i="0" sz="1800" u="none" cap="none" strike="noStrike">
-              <a:solidFill>
-                <a:schemeClr val="dk1"/>
-              </a:solidFill>
-              <a:latin typeface="Calibri"/>
-              <a:ea typeface="Calibri"/>
-              <a:cs typeface="Calibri"/>
-              <a:sym typeface="Calibri"/>
-            </a:endParaRPr>
-          </a:p>
-        </p:txBody>
-      </p:sp>
-      <p:sp>
-        <p:nvSpPr>
-          <p:cNvPr id="374" name="Google Shape;374;p27"/>
-          <p:cNvSpPr/>
-          <p:nvPr/>
-        </p:nvSpPr>
-        <p:spPr>
-          <a:xfrm>
-            <a:off x="1023937" y="3104257"/>
-            <a:ext cx="10144125" cy="9525"/>
-          </a:xfrm>
-          <a:prstGeom prst="rect">
-            <a:avLst/>
-          </a:prstGeom>
-          <a:solidFill>
-            <a:srgbClr val="757575"/>
-          </a:solidFill>
-          <a:ln>
-            <a:noFill/>
-          </a:ln>
-        </p:spPr>
-        <p:txBody>
-          <a:bodyPr anchorCtr="0" anchor="ctr" bIns="45700" lIns="91425" spcFirstLastPara="1" rIns="91425" wrap="square" tIns="45700">
-            <a:noAutofit/>
-          </a:bodyPr>
-          <a:lstStyle/>
-          <a:p>
-            <a:pPr indent="0" lvl="0" marL="0" marR="0" rtl="0" algn="ctr">
-              <a:spcBef>
-                <a:spcPts val="0"/>
-              </a:spcBef>
-              <a:spcAft>
-                <a:spcPts val="0"/>
-              </a:spcAft>
-              <a:buNone/>
-            </a:pPr>
-            <a:r>
-              <a:t/>
-            </a:r>
-            <a:endParaRPr b="0" i="0" sz="1800" u="none" cap="none" strike="noStrike">
-              <a:solidFill>
-                <a:schemeClr val="dk1"/>
-              </a:solidFill>
-              <a:latin typeface="Calibri"/>
-              <a:ea typeface="Calibri"/>
-              <a:cs typeface="Calibri"/>
-              <a:sym typeface="Calibri"/>
-            </a:endParaRPr>
-          </a:p>
-        </p:txBody>
-      </p:sp>
-      <p:sp>
-        <p:nvSpPr>
-          <p:cNvPr id="375" name="Google Shape;375;p27"/>
-          <p:cNvSpPr/>
-          <p:nvPr/>
-        </p:nvSpPr>
-        <p:spPr>
-          <a:xfrm>
-            <a:off x="1023937" y="3104257"/>
-            <a:ext cx="10144125" cy="9525"/>
-          </a:xfrm>
-          <a:prstGeom prst="rect">
-            <a:avLst/>
-          </a:prstGeom>
-          <a:solidFill>
-            <a:srgbClr val="757575"/>
-          </a:solidFill>
-          <a:ln>
-            <a:noFill/>
-          </a:ln>
-        </p:spPr>
-        <p:txBody>
-          <a:bodyPr anchorCtr="0" anchor="ctr" bIns="45700" lIns="91425" spcFirstLastPara="1" rIns="91425" wrap="square" tIns="45700">
-            <a:noAutofit/>
-          </a:bodyPr>
-          <a:lstStyle/>
-          <a:p>
-            <a:pPr indent="0" lvl="0" marL="0" marR="0" rtl="0" algn="ctr">
-              <a:spcBef>
-                <a:spcPts val="0"/>
-              </a:spcBef>
-              <a:spcAft>
-                <a:spcPts val="0"/>
-              </a:spcAft>
-              <a:buNone/>
-            </a:pPr>
-            <a:r>
-              <a:t/>
-            </a:r>
-            <a:endParaRPr b="0" i="0" sz="1800" u="none" cap="none" strike="noStrike">
-              <a:solidFill>
-                <a:schemeClr val="dk1"/>
-              </a:solidFill>
-              <a:latin typeface="Calibri"/>
-              <a:ea typeface="Calibri"/>
-              <a:cs typeface="Calibri"/>
-              <a:sym typeface="Calibri"/>
-            </a:endParaRPr>
-          </a:p>
-        </p:txBody>
-      </p:sp>
-      <p:sp>
-        <p:nvSpPr>
-          <p:cNvPr id="376" name="Google Shape;376;p27"/>
-          <p:cNvSpPr/>
-          <p:nvPr/>
-        </p:nvSpPr>
-        <p:spPr>
-          <a:xfrm>
-            <a:off x="1023937" y="3889027"/>
-            <a:ext cx="10144125" cy="9525"/>
-          </a:xfrm>
-          <a:prstGeom prst="rect">
-            <a:avLst/>
-          </a:prstGeom>
-          <a:solidFill>
-            <a:srgbClr val="757575"/>
-          </a:solidFill>
-          <a:ln>
-            <a:noFill/>
-          </a:ln>
-        </p:spPr>
-        <p:txBody>
-          <a:bodyPr anchorCtr="0" anchor="ctr" bIns="45700" lIns="91425" spcFirstLastPara="1" rIns="91425" wrap="square" tIns="45700">
-            <a:noAutofit/>
-          </a:bodyPr>
-          <a:lstStyle/>
-          <a:p>
-            <a:pPr indent="0" lvl="0" marL="0" marR="0" rtl="0" algn="ctr">
-              <a:spcBef>
-                <a:spcPts val="0"/>
-              </a:spcBef>
-              <a:spcAft>
-                <a:spcPts val="0"/>
-              </a:spcAft>
-              <a:buNone/>
-            </a:pPr>
-            <a:r>
-              <a:t/>
-            </a:r>
-            <a:endParaRPr b="0" i="0" sz="1800" u="none" cap="none" strike="noStrike">
-              <a:solidFill>
-                <a:schemeClr val="dk1"/>
-              </a:solidFill>
-              <a:latin typeface="Calibri"/>
-              <a:ea typeface="Calibri"/>
-              <a:cs typeface="Calibri"/>
-              <a:sym typeface="Calibri"/>
-            </a:endParaRPr>
-          </a:p>
-        </p:txBody>
-      </p:sp>
-      <p:sp>
-        <p:nvSpPr>
-          <p:cNvPr id="377" name="Google Shape;377;p27"/>
-          <p:cNvSpPr/>
-          <p:nvPr/>
-        </p:nvSpPr>
-        <p:spPr>
-          <a:xfrm>
-            <a:off x="1023937" y="3889027"/>
-            <a:ext cx="10144125" cy="9525"/>
-          </a:xfrm>
-          <a:prstGeom prst="rect">
-            <a:avLst/>
-          </a:prstGeom>
-          <a:solidFill>
-            <a:srgbClr val="757575"/>
-          </a:solidFill>
-          <a:ln>
-            <a:noFill/>
-          </a:ln>
-        </p:spPr>
-        <p:txBody>
-          <a:bodyPr anchorCtr="0" anchor="ctr" bIns="45700" lIns="91425" spcFirstLastPara="1" rIns="91425" wrap="square" tIns="45700">
-            <a:noAutofit/>
-          </a:bodyPr>
-          <a:lstStyle/>
-          <a:p>
-            <a:pPr indent="0" lvl="0" marL="0" marR="0" rtl="0" algn="ctr">
-              <a:spcBef>
-                <a:spcPts val="0"/>
-              </a:spcBef>
-              <a:spcAft>
-                <a:spcPts val="0"/>
-              </a:spcAft>
-              <a:buNone/>
-            </a:pPr>
-            <a:r>
-              <a:t/>
-            </a:r>
-            <a:endParaRPr b="0" i="0" sz="1800" u="none" cap="none" strike="noStrike">
-              <a:solidFill>
-                <a:schemeClr val="dk1"/>
-              </a:solidFill>
-              <a:latin typeface="Calibri"/>
-              <a:ea typeface="Calibri"/>
-              <a:cs typeface="Calibri"/>
-              <a:sym typeface="Calibri"/>
-            </a:endParaRPr>
-          </a:p>
-        </p:txBody>
-      </p:sp>
-      <p:sp>
-        <p:nvSpPr>
-          <p:cNvPr id="378" name="Google Shape;378;p27"/>
-          <p:cNvSpPr/>
-          <p:nvPr/>
-        </p:nvSpPr>
-        <p:spPr>
-          <a:xfrm>
-            <a:off x="1023937" y="4673798"/>
-            <a:ext cx="10144125" cy="9525"/>
-          </a:xfrm>
-          <a:prstGeom prst="rect">
-            <a:avLst/>
-          </a:prstGeom>
-          <a:solidFill>
-            <a:srgbClr val="757575"/>
-          </a:solidFill>
-          <a:ln>
-            <a:noFill/>
-          </a:ln>
-        </p:spPr>
-        <p:txBody>
-          <a:bodyPr anchorCtr="0" anchor="ctr" bIns="45700" lIns="91425" spcFirstLastPara="1" rIns="91425" wrap="square" tIns="45700">
-            <a:noAutofit/>
-          </a:bodyPr>
-          <a:lstStyle/>
-          <a:p>
-            <a:pPr indent="0" lvl="0" marL="0" marR="0" rtl="0" algn="ctr">
-              <a:spcBef>
-                <a:spcPts val="0"/>
-              </a:spcBef>
-              <a:spcAft>
-                <a:spcPts val="0"/>
-              </a:spcAft>
-              <a:buNone/>
-            </a:pPr>
-            <a:r>
-              <a:t/>
-            </a:r>
-            <a:endParaRPr b="0" i="0" sz="1800" u="none" cap="none" strike="noStrike">
-              <a:solidFill>
-                <a:schemeClr val="dk1"/>
-              </a:solidFill>
-              <a:latin typeface="Calibri"/>
-              <a:ea typeface="Calibri"/>
-              <a:cs typeface="Calibri"/>
-              <a:sym typeface="Calibri"/>
-            </a:endParaRPr>
-          </a:p>
-        </p:txBody>
-      </p:sp>
-      <p:sp>
-        <p:nvSpPr>
-          <p:cNvPr id="379" name="Google Shape;379;p27"/>
-          <p:cNvSpPr/>
-          <p:nvPr/>
-        </p:nvSpPr>
-        <p:spPr>
-          <a:xfrm>
-            <a:off x="1023937" y="4673798"/>
-            <a:ext cx="10144125" cy="9525"/>
-          </a:xfrm>
-          <a:prstGeom prst="rect">
-            <a:avLst/>
-          </a:prstGeom>
-          <a:solidFill>
-            <a:srgbClr val="757575"/>
-          </a:solidFill>
-          <a:ln>
-            <a:noFill/>
-          </a:ln>
-        </p:spPr>
-        <p:txBody>
-          <a:bodyPr anchorCtr="0" anchor="ctr" bIns="45700" lIns="91425" spcFirstLastPara="1" rIns="91425" wrap="square" tIns="45700">
-            <a:noAutofit/>
-          </a:bodyPr>
-          <a:lstStyle/>
-          <a:p>
-            <a:pPr indent="0" lvl="0" marL="0" marR="0" rtl="0" algn="ctr">
-              <a:spcBef>
-                <a:spcPts val="0"/>
-              </a:spcBef>
-              <a:spcAft>
-                <a:spcPts val="0"/>
-              </a:spcAft>
-              <a:buNone/>
-            </a:pPr>
-            <a:r>
-              <a:t/>
-            </a:r>
-            <a:endParaRPr b="0" i="0" sz="1800" u="none" cap="none" strike="noStrike">
-              <a:solidFill>
-                <a:schemeClr val="dk1"/>
-              </a:solidFill>
-              <a:latin typeface="Calibri"/>
-              <a:ea typeface="Calibri"/>
-              <a:cs typeface="Calibri"/>
-              <a:sym typeface="Calibri"/>
-            </a:endParaRPr>
-          </a:p>
-        </p:txBody>
-      </p:sp>
-      <p:pic>
-        <p:nvPicPr>
-          <p:cNvPr descr="image.png" id="380" name="Google Shape;380;p27"/>
-          <p:cNvPicPr preferRelativeResize="0"/>
-          <p:nvPr/>
-        </p:nvPicPr>
-        <p:blipFill rotWithShape="1">
-          <a:blip r:embed="rId4">
-            <a:alphaModFix/>
-          </a:blip>
-          <a:srcRect b="0" l="0" r="0" t="0"/>
-          <a:stretch/>
-        </p:blipFill>
-        <p:spPr>
-          <a:xfrm>
-            <a:off x="1023937" y="2478434"/>
-            <a:ext cx="857250" cy="476250"/>
-          </a:xfrm>
-          <a:prstGeom prst="rect">
-            <a:avLst/>
-          </a:prstGeom>
-          <a:noFill/>
-          <a:ln>
-            <a:noFill/>
-          </a:ln>
-        </p:spPr>
-      </p:pic>
-      <p:sp>
-        <p:nvSpPr>
-          <p:cNvPr id="381" name="Google Shape;381;p27"/>
-          <p:cNvSpPr txBox="1"/>
-          <p:nvPr/>
-        </p:nvSpPr>
-        <p:spPr>
-          <a:xfrm>
-            <a:off x="2119312" y="2471886"/>
-            <a:ext cx="9048750" cy="198090"/>
-          </a:xfrm>
-          <a:prstGeom prst="rect">
-            <a:avLst/>
-          </a:prstGeom>
-          <a:noFill/>
-          <a:ln>
-            <a:noFill/>
-          </a:ln>
-        </p:spPr>
-        <p:txBody>
-          <a:bodyPr anchorCtr="0" anchor="t" bIns="0" lIns="0" spcFirstLastPara="1" rIns="0" wrap="square" tIns="0">
-            <a:spAutoFit/>
-          </a:bodyPr>
-          <a:lstStyle/>
-          <a:p>
-            <a:pPr indent="0" lvl="0" marL="0" marR="0" rtl="0" algn="l">
-              <a:lnSpc>
-                <a:spcPct val="160000"/>
-              </a:lnSpc>
-              <a:spcBef>
-                <a:spcPts val="0"/>
-              </a:spcBef>
-              <a:spcAft>
-                <a:spcPts val="0"/>
-              </a:spcAft>
-              <a:buNone/>
-            </a:pPr>
-            <a:r>
-              <a:rPr b="0" i="0" lang="en-US" sz="975" u="none" cap="none" strike="noStrike">
-                <a:solidFill>
-                  <a:srgbClr val="CBD5E1"/>
-                </a:solidFill>
-                <a:latin typeface="Inter"/>
-                <a:ea typeface="Inter"/>
-                <a:cs typeface="Inter"/>
-                <a:sym typeface="Inter"/>
-              </a:rPr>
-              <a:t>https://images.stockcake.com/public/f/7/0/f7075d35-cf06-4380-9094-9a8d80d5d946_large/digital-india-map-stockcake.jpg</a:t>
-            </a:r>
-            <a:endParaRPr/>
-          </a:p>
-        </p:txBody>
-      </p:sp>
-      <p:sp>
-        <p:nvSpPr>
-          <p:cNvPr id="382" name="Google Shape;382;p27"/>
-          <p:cNvSpPr txBox="1"/>
-          <p:nvPr/>
-        </p:nvSpPr>
-        <p:spPr>
-          <a:xfrm>
-            <a:off x="2119312" y="2717601"/>
-            <a:ext cx="9048750" cy="243780"/>
-          </a:xfrm>
-          <a:prstGeom prst="rect">
-            <a:avLst/>
-          </a:prstGeom>
-          <a:noFill/>
-          <a:ln>
-            <a:noFill/>
-          </a:ln>
-        </p:spPr>
-        <p:txBody>
-          <a:bodyPr anchorCtr="0" anchor="t" bIns="0" lIns="0" spcFirstLastPara="1" rIns="0" wrap="square" tIns="0">
-            <a:spAutoFit/>
-          </a:bodyPr>
-          <a:lstStyle/>
-          <a:p>
-            <a:pPr indent="0" lvl="0" marL="0" marR="0" rtl="0" algn="l">
-              <a:lnSpc>
-                <a:spcPct val="160000"/>
-              </a:lnSpc>
-              <a:spcBef>
-                <a:spcPts val="0"/>
-              </a:spcBef>
-              <a:spcAft>
-                <a:spcPts val="0"/>
-              </a:spcAft>
-              <a:buNone/>
-            </a:pPr>
-            <a:r>
-              <a:rPr b="0" i="0" lang="en-US" sz="1200" u="none" cap="none" strike="noStrike">
-                <a:solidFill>
-                  <a:srgbClr val="CBD5E1"/>
-                </a:solidFill>
-                <a:latin typeface="Inter"/>
-                <a:ea typeface="Inter"/>
-                <a:cs typeface="Inter"/>
-                <a:sym typeface="Inter"/>
-              </a:rPr>
-              <a:t>Source: </a:t>
-            </a:r>
-            <a:r>
-              <a:rPr b="0" i="0" lang="en-US" sz="1200" u="none" cap="none" strike="noStrike">
-                <a:solidFill>
-                  <a:srgbClr val="4F46E5"/>
-                </a:solidFill>
-                <a:latin typeface="Inter"/>
-                <a:ea typeface="Inter"/>
-                <a:cs typeface="Inter"/>
-                <a:sym typeface="Inter"/>
-              </a:rPr>
-              <a:t>stockcake.com</a:t>
-            </a:r>
-            <a:endParaRPr/>
-          </a:p>
-        </p:txBody>
-      </p:sp>
-      <p:pic>
-        <p:nvPicPr>
-          <p:cNvPr descr="image.png" id="383" name="Google Shape;383;p27"/>
-          <p:cNvPicPr preferRelativeResize="0"/>
-          <p:nvPr/>
-        </p:nvPicPr>
-        <p:blipFill rotWithShape="1">
-          <a:blip r:embed="rId5">
-            <a:alphaModFix/>
-          </a:blip>
-          <a:srcRect b="0" l="0" r="0" t="0"/>
-          <a:stretch/>
-        </p:blipFill>
-        <p:spPr>
-          <a:xfrm>
-            <a:off x="1023937" y="3263205"/>
-            <a:ext cx="857250" cy="476250"/>
-          </a:xfrm>
-          <a:prstGeom prst="rect">
-            <a:avLst/>
-          </a:prstGeom>
-          <a:noFill/>
-          <a:ln>
-            <a:noFill/>
-          </a:ln>
-        </p:spPr>
-      </p:pic>
-      <p:sp>
-        <p:nvSpPr>
-          <p:cNvPr id="384" name="Google Shape;384;p27"/>
-          <p:cNvSpPr txBox="1"/>
-          <p:nvPr/>
-        </p:nvSpPr>
-        <p:spPr>
-          <a:xfrm>
-            <a:off x="2119312" y="3256657"/>
-            <a:ext cx="9048750" cy="198090"/>
-          </a:xfrm>
-          <a:prstGeom prst="rect">
-            <a:avLst/>
-          </a:prstGeom>
-          <a:noFill/>
-          <a:ln>
-            <a:noFill/>
-          </a:ln>
-        </p:spPr>
-        <p:txBody>
-          <a:bodyPr anchorCtr="0" anchor="t" bIns="0" lIns="0" spcFirstLastPara="1" rIns="0" wrap="square" tIns="0">
-            <a:spAutoFit/>
-          </a:bodyPr>
-          <a:lstStyle/>
-          <a:p>
-            <a:pPr indent="0" lvl="0" marL="0" marR="0" rtl="0" algn="l">
-              <a:lnSpc>
-                <a:spcPct val="160000"/>
-              </a:lnSpc>
-              <a:spcBef>
-                <a:spcPts val="0"/>
-              </a:spcBef>
-              <a:spcAft>
-                <a:spcPts val="0"/>
-              </a:spcAft>
-              <a:buNone/>
-            </a:pPr>
-            <a:r>
-              <a:rPr b="0" i="0" lang="en-US" sz="975" u="none" cap="none" strike="noStrike">
-                <a:solidFill>
-                  <a:srgbClr val="CBD5E1"/>
-                </a:solidFill>
-                <a:latin typeface="Inter"/>
-                <a:ea typeface="Inter"/>
-                <a:cs typeface="Inter"/>
-                <a:sym typeface="Inter"/>
-              </a:rPr>
-              <a:t>https://images.stockcake.com/public/6/2/5/62597fb8-ae9a-400d-a6c5-daa7a5bac0f8_large/neon-hacker-stockcake.jpg</a:t>
-            </a:r>
-            <a:endParaRPr/>
-          </a:p>
-        </p:txBody>
-      </p:sp>
-      <p:sp>
-        <p:nvSpPr>
-          <p:cNvPr id="385" name="Google Shape;385;p27"/>
-          <p:cNvSpPr txBox="1"/>
-          <p:nvPr/>
-        </p:nvSpPr>
-        <p:spPr>
-          <a:xfrm>
-            <a:off x="2119312" y="3502372"/>
-            <a:ext cx="9048750" cy="243780"/>
-          </a:xfrm>
-          <a:prstGeom prst="rect">
-            <a:avLst/>
-          </a:prstGeom>
-          <a:noFill/>
-          <a:ln>
-            <a:noFill/>
-          </a:ln>
-        </p:spPr>
-        <p:txBody>
-          <a:bodyPr anchorCtr="0" anchor="t" bIns="0" lIns="0" spcFirstLastPara="1" rIns="0" wrap="square" tIns="0">
-            <a:spAutoFit/>
-          </a:bodyPr>
-          <a:lstStyle/>
-          <a:p>
-            <a:pPr indent="0" lvl="0" marL="0" marR="0" rtl="0" algn="l">
-              <a:lnSpc>
-                <a:spcPct val="160000"/>
-              </a:lnSpc>
-              <a:spcBef>
-                <a:spcPts val="0"/>
-              </a:spcBef>
-              <a:spcAft>
-                <a:spcPts val="0"/>
-              </a:spcAft>
-              <a:buNone/>
-            </a:pPr>
-            <a:r>
-              <a:rPr b="0" i="0" lang="en-US" sz="1200" u="none" cap="none" strike="noStrike">
-                <a:solidFill>
-                  <a:srgbClr val="CBD5E1"/>
-                </a:solidFill>
-                <a:latin typeface="Inter"/>
-                <a:ea typeface="Inter"/>
-                <a:cs typeface="Inter"/>
-                <a:sym typeface="Inter"/>
-              </a:rPr>
-              <a:t>Source: </a:t>
-            </a:r>
-            <a:r>
-              <a:rPr b="0" i="0" lang="en-US" sz="1200" u="none" cap="none" strike="noStrike">
-                <a:solidFill>
-                  <a:srgbClr val="4F46E5"/>
-                </a:solidFill>
-                <a:latin typeface="Inter"/>
-                <a:ea typeface="Inter"/>
-                <a:cs typeface="Inter"/>
-                <a:sym typeface="Inter"/>
-              </a:rPr>
-              <a:t>stockcake.com</a:t>
-            </a:r>
-            <a:endParaRPr/>
-          </a:p>
-        </p:txBody>
-      </p:sp>
-      <p:pic>
-        <p:nvPicPr>
-          <p:cNvPr descr="image.png" id="386" name="Google Shape;386;p27"/>
-          <p:cNvPicPr preferRelativeResize="0"/>
-          <p:nvPr/>
-        </p:nvPicPr>
-        <p:blipFill rotWithShape="1">
-          <a:blip r:embed="rId6">
-            <a:alphaModFix/>
-          </a:blip>
-          <a:srcRect b="0" l="0" r="0" t="0"/>
-          <a:stretch/>
-        </p:blipFill>
-        <p:spPr>
-          <a:xfrm>
-            <a:off x="1023937" y="4047976"/>
-            <a:ext cx="857250" cy="476250"/>
-          </a:xfrm>
-          <a:prstGeom prst="rect">
-            <a:avLst/>
-          </a:prstGeom>
-          <a:noFill/>
-          <a:ln>
-            <a:noFill/>
-          </a:ln>
-        </p:spPr>
-      </p:pic>
-      <p:sp>
-        <p:nvSpPr>
-          <p:cNvPr id="387" name="Google Shape;387;p27"/>
-          <p:cNvSpPr txBox="1"/>
-          <p:nvPr/>
-        </p:nvSpPr>
-        <p:spPr>
-          <a:xfrm>
-            <a:off x="2119312" y="4041427"/>
-            <a:ext cx="9048750" cy="198090"/>
-          </a:xfrm>
-          <a:prstGeom prst="rect">
-            <a:avLst/>
-          </a:prstGeom>
-          <a:noFill/>
-          <a:ln>
-            <a:noFill/>
-          </a:ln>
-        </p:spPr>
-        <p:txBody>
-          <a:bodyPr anchorCtr="0" anchor="t" bIns="0" lIns="0" spcFirstLastPara="1" rIns="0" wrap="square" tIns="0">
-            <a:spAutoFit/>
-          </a:bodyPr>
-          <a:lstStyle/>
-          <a:p>
-            <a:pPr indent="0" lvl="0" marL="0" marR="0" rtl="0" algn="l">
-              <a:lnSpc>
-                <a:spcPct val="160000"/>
-              </a:lnSpc>
-              <a:spcBef>
-                <a:spcPts val="0"/>
-              </a:spcBef>
-              <a:spcAft>
-                <a:spcPts val="0"/>
-              </a:spcAft>
-              <a:buNone/>
-            </a:pPr>
-            <a:r>
-              <a:rPr b="0" i="0" lang="en-US" sz="975" u="none" cap="none" strike="noStrike">
-                <a:solidFill>
-                  <a:srgbClr val="CBD5E1"/>
-                </a:solidFill>
-                <a:latin typeface="Inter"/>
-                <a:ea typeface="Inter"/>
-                <a:cs typeface="Inter"/>
-                <a:sym typeface="Inter"/>
-              </a:rPr>
-              <a:t>https://images.stockcake.com/public/6/3/9/639b1338-0841-44c1-83da-02e5bd836340_large/neon-dashboard-interface-stockcake.jpg</a:t>
-            </a:r>
-            <a:endParaRPr/>
-          </a:p>
-        </p:txBody>
-      </p:sp>
-      <p:sp>
-        <p:nvSpPr>
-          <p:cNvPr id="388" name="Google Shape;388;p27"/>
-          <p:cNvSpPr txBox="1"/>
-          <p:nvPr/>
-        </p:nvSpPr>
-        <p:spPr>
-          <a:xfrm>
-            <a:off x="2119312" y="4287142"/>
-            <a:ext cx="9048750" cy="243780"/>
-          </a:xfrm>
-          <a:prstGeom prst="rect">
-            <a:avLst/>
-          </a:prstGeom>
-          <a:noFill/>
-          <a:ln>
-            <a:noFill/>
-          </a:ln>
-        </p:spPr>
-        <p:txBody>
-          <a:bodyPr anchorCtr="0" anchor="t" bIns="0" lIns="0" spcFirstLastPara="1" rIns="0" wrap="square" tIns="0">
-            <a:spAutoFit/>
-          </a:bodyPr>
-          <a:lstStyle/>
-          <a:p>
-            <a:pPr indent="0" lvl="0" marL="0" marR="0" rtl="0" algn="l">
-              <a:lnSpc>
-                <a:spcPct val="160000"/>
-              </a:lnSpc>
-              <a:spcBef>
-                <a:spcPts val="0"/>
-              </a:spcBef>
-              <a:spcAft>
-                <a:spcPts val="0"/>
-              </a:spcAft>
-              <a:buNone/>
-            </a:pPr>
-            <a:r>
-              <a:rPr b="0" i="0" lang="en-US" sz="1200" u="none" cap="none" strike="noStrike">
-                <a:solidFill>
-                  <a:srgbClr val="CBD5E1"/>
-                </a:solidFill>
-                <a:latin typeface="Inter"/>
-                <a:ea typeface="Inter"/>
-                <a:cs typeface="Inter"/>
-                <a:sym typeface="Inter"/>
-              </a:rPr>
-              <a:t>Source: </a:t>
-            </a:r>
-            <a:r>
-              <a:rPr b="0" i="0" lang="en-US" sz="1200" u="none" cap="none" strike="noStrike">
-                <a:solidFill>
-                  <a:srgbClr val="4F46E5"/>
-                </a:solidFill>
-                <a:latin typeface="Inter"/>
-                <a:ea typeface="Inter"/>
-                <a:cs typeface="Inter"/>
-                <a:sym typeface="Inter"/>
-              </a:rPr>
-              <a:t>stockcake.com</a:t>
-            </a:r>
-            <a:endParaRPr/>
-          </a:p>
-        </p:txBody>
-      </p:sp>
-      <p:pic>
-        <p:nvPicPr>
-          <p:cNvPr descr="image.png" id="389" name="Google Shape;389;p27"/>
-          <p:cNvPicPr preferRelativeResize="0"/>
-          <p:nvPr/>
-        </p:nvPicPr>
-        <p:blipFill rotWithShape="1">
-          <a:blip r:embed="rId7">
-            <a:alphaModFix/>
-          </a:blip>
-          <a:srcRect b="0" l="0" r="0" t="0"/>
-          <a:stretch/>
-        </p:blipFill>
-        <p:spPr>
-          <a:xfrm>
-            <a:off x="1023937" y="4832746"/>
-            <a:ext cx="857250" cy="476250"/>
-          </a:xfrm>
-          <a:prstGeom prst="rect">
-            <a:avLst/>
-          </a:prstGeom>
-          <a:noFill/>
-          <a:ln>
-            <a:noFill/>
-          </a:ln>
-        </p:spPr>
-      </p:pic>
-      <p:sp>
-        <p:nvSpPr>
-          <p:cNvPr id="390" name="Google Shape;390;p27"/>
-          <p:cNvSpPr txBox="1"/>
-          <p:nvPr/>
-        </p:nvSpPr>
-        <p:spPr>
-          <a:xfrm>
-            <a:off x="2119312" y="4826198"/>
-            <a:ext cx="9048750" cy="198090"/>
-          </a:xfrm>
-          <a:prstGeom prst="rect">
-            <a:avLst/>
-          </a:prstGeom>
-          <a:noFill/>
-          <a:ln>
-            <a:noFill/>
-          </a:ln>
-        </p:spPr>
-        <p:txBody>
-          <a:bodyPr anchorCtr="0" anchor="t" bIns="0" lIns="0" spcFirstLastPara="1" rIns="0" wrap="square" tIns="0">
-            <a:spAutoFit/>
-          </a:bodyPr>
-          <a:lstStyle/>
-          <a:p>
-            <a:pPr indent="0" lvl="0" marL="0" marR="0" rtl="0" algn="l">
-              <a:lnSpc>
-                <a:spcPct val="160000"/>
-              </a:lnSpc>
-              <a:spcBef>
-                <a:spcPts val="0"/>
-              </a:spcBef>
-              <a:spcAft>
-                <a:spcPts val="0"/>
-              </a:spcAft>
-              <a:buNone/>
-            </a:pPr>
-            <a:r>
-              <a:rPr b="0" i="0" lang="en-US" sz="975" u="none" cap="none" strike="noStrike">
-                <a:solidFill>
-                  <a:srgbClr val="CBD5E1"/>
-                </a:solidFill>
-                <a:latin typeface="Inter"/>
-                <a:ea typeface="Inter"/>
-                <a:cs typeface="Inter"/>
-                <a:sym typeface="Inter"/>
-              </a:rPr>
-              <a:t>https://static.vecteezy.com/system/resources/thumbnails/052/635/224/small_2x/neon-spaceship-taking-off-from-earth-on-black-background-vector.jpg</a:t>
-            </a:r>
-            <a:endParaRPr/>
-          </a:p>
-        </p:txBody>
-      </p:sp>
-      <p:sp>
-        <p:nvSpPr>
-          <p:cNvPr id="391" name="Google Shape;391;p27"/>
-          <p:cNvSpPr txBox="1"/>
-          <p:nvPr/>
-        </p:nvSpPr>
-        <p:spPr>
-          <a:xfrm>
-            <a:off x="2119312" y="5071913"/>
-            <a:ext cx="9048750" cy="243780"/>
-          </a:xfrm>
-          <a:prstGeom prst="rect">
-            <a:avLst/>
-          </a:prstGeom>
-          <a:noFill/>
-          <a:ln>
-            <a:noFill/>
-          </a:ln>
-        </p:spPr>
-        <p:txBody>
-          <a:bodyPr anchorCtr="0" anchor="t" bIns="0" lIns="0" spcFirstLastPara="1" rIns="0" wrap="square" tIns="0">
-            <a:spAutoFit/>
-          </a:bodyPr>
-          <a:lstStyle/>
-          <a:p>
-            <a:pPr indent="0" lvl="0" marL="0" marR="0" rtl="0" algn="l">
-              <a:lnSpc>
-                <a:spcPct val="160000"/>
-              </a:lnSpc>
-              <a:spcBef>
-                <a:spcPts val="0"/>
-              </a:spcBef>
-              <a:spcAft>
-                <a:spcPts val="0"/>
-              </a:spcAft>
-              <a:buNone/>
-            </a:pPr>
-            <a:r>
-              <a:rPr b="0" i="0" lang="en-US" sz="1200" u="none" cap="none" strike="noStrike">
-                <a:solidFill>
-                  <a:srgbClr val="CBD5E1"/>
-                </a:solidFill>
-                <a:latin typeface="Inter"/>
-                <a:ea typeface="Inter"/>
-                <a:cs typeface="Inter"/>
-                <a:sym typeface="Inter"/>
-              </a:rPr>
-              <a:t>Source: </a:t>
-            </a:r>
-            <a:r>
-              <a:rPr b="0" i="0" lang="en-US" sz="1200" u="none" cap="none" strike="noStrike">
-                <a:solidFill>
-                  <a:srgbClr val="4F46E5"/>
-                </a:solidFill>
-                <a:latin typeface="Inter"/>
-                <a:ea typeface="Inter"/>
-                <a:cs typeface="Inter"/>
-                <a:sym typeface="Inter"/>
-              </a:rPr>
-              <a:t>www.vecteezy.com</a:t>
-            </a:r>
-            <a:endParaRPr/>
-          </a:p>
-        </p:txBody>
-      </p:sp>
-      <p:sp>
-        <p:nvSpPr>
-          <p:cNvPr id="392" name="Google Shape;392;p27"/>
-          <p:cNvSpPr txBox="1"/>
-          <p:nvPr/>
-        </p:nvSpPr>
-        <p:spPr>
-          <a:xfrm>
-            <a:off x="771525" y="581025"/>
-            <a:ext cx="11381422" cy="548580"/>
-          </a:xfrm>
-          <a:prstGeom prst="rect">
-            <a:avLst/>
-          </a:prstGeom>
-          <a:noFill/>
-          <a:ln>
-            <a:noFill/>
-          </a:ln>
-        </p:spPr>
-        <p:txBody>
-          <a:bodyPr anchorCtr="0" anchor="t" bIns="0" lIns="0" spcFirstLastPara="1" rIns="0" wrap="square" tIns="0">
-            <a:spAutoFit/>
-          </a:bodyPr>
-          <a:lstStyle/>
-          <a:p>
-            <a:pPr indent="0" lvl="0" marL="0" marR="0" rtl="0" algn="l">
-              <a:lnSpc>
-                <a:spcPct val="120000"/>
-              </a:lnSpc>
-              <a:spcBef>
-                <a:spcPts val="0"/>
-              </a:spcBef>
-              <a:spcAft>
-                <a:spcPts val="0"/>
-              </a:spcAft>
-              <a:buNone/>
-            </a:pPr>
-            <a:r>
-              <a:rPr b="0" i="0" lang="en-US" sz="3600" u="none" cap="none" strike="noStrike">
-                <a:solidFill>
-                  <a:srgbClr val="F8FAFC"/>
-                </a:solidFill>
-                <a:latin typeface="Inter SemiBold"/>
-                <a:ea typeface="Inter SemiBold"/>
-                <a:cs typeface="Inter SemiBold"/>
-                <a:sym typeface="Inter SemiBold"/>
-              </a:rPr>
-              <a:t>Image Sources</a:t>
-            </a:r>
-            <a:endParaRPr/>
-          </a:p>
-        </p:txBody>
-      </p:sp>
-      <p:sp>
-        <p:nvSpPr>
-          <p:cNvPr id="393" name="Google Shape;393;p27"/>
-          <p:cNvSpPr/>
-          <p:nvPr/>
-        </p:nvSpPr>
-        <p:spPr>
-          <a:xfrm>
-            <a:off x="581025" y="581025"/>
-            <a:ext cx="47625" cy="548580"/>
-          </a:xfrm>
-          <a:prstGeom prst="rect">
-            <a:avLst/>
-          </a:prstGeom>
-          <a:solidFill>
-            <a:srgbClr val="A855F7"/>
-          </a:solidFill>
-          <a:ln>
-            <a:noFill/>
-          </a:ln>
-        </p:spPr>
-        <p:txBody>
-          <a:bodyPr anchorCtr="0" anchor="ctr" bIns="45700" lIns="91425" spcFirstLastPara="1" rIns="91425" wrap="square" tIns="45700">
-            <a:noAutofit/>
-          </a:bodyPr>
-          <a:lstStyle/>
-          <a:p>
-            <a:pPr indent="0" lvl="0" marL="0" marR="0" rtl="0" algn="ctr">
-              <a:spcBef>
-                <a:spcPts val="0"/>
-              </a:spcBef>
-              <a:spcAft>
-                <a:spcPts val="0"/>
-              </a:spcAft>
-              <a:buNone/>
-            </a:pPr>
-            <a:r>
-              <a:t/>
-            </a:r>
-            <a:endParaRPr b="0" i="0" sz="1800" u="none" cap="none" strike="noStrike">
-              <a:solidFill>
-                <a:schemeClr val="dk1"/>
-              </a:solidFill>
-              <a:latin typeface="Calibri"/>
-              <a:ea typeface="Calibri"/>
-              <a:cs typeface="Calibri"/>
-              <a:sym typeface="Calibri"/>
-            </a:endParaRPr>
-          </a:p>
-        </p:txBody>
-      </p:sp>
-    </p:spTree>
-  </p:cSld>
-  <p:clrMapOvr>
-    <a:masterClrMapping/>
-  </p:clrMapOvr>
-</p:sld>
-</file>
-
 <file path=ppt/slides/slide2.xml><?xml version="1.0" encoding="utf-8"?>
 <p:sld xmlns:a="http://schemas.openxmlformats.org/drawingml/2006/main" xmlns:r="http://schemas.openxmlformats.org/officeDocument/2006/relationships" xmlns:mc="http://schemas.openxmlformats.org/markup-compatibility/2006" xmlns:mv="urn:schemas-microsoft-com:mac:vml" xmlns:p="http://schemas.openxmlformats.org/presentationml/2006/main" xmlns:c="http://schemas.openxmlformats.org/drawingml/2006/chart" xmlns:dgm="http://schemas.openxmlformats.org/drawingml/2006/diagram" xmlns:o="urn:schemas-microsoft-com:office:office" xmlns:v="urn:schemas-microsoft-com:vml" xmlns:pvml="urn:schemas-microsoft-com:office:powerpoint" xmlns:com="http://schemas.openxmlformats.org/drawingml/2006/compatibility" xmlns:p14="http://schemas.microsoft.com/office/powerpoint/2010/main" xmlns:p15="http://schemas.microsoft.com/office/powerpoint/2012/main" xmlns:ahyp="http://schemas.microsoft.com/office/drawing/2018/hyperlinkcolor">
   <p:cSld>
